--- a/docs/poster/AI·SW 신기술 전공 프로젝트 발표회_분반_전동기_초안.pptx
+++ b/docs/poster/AI·SW 신기술 전공 프로젝트 발표회_분반_전동기_초안.pptx
@@ -8259,7 +8259,7 @@
       </p:sp>
       <p:sp>
         <p:nvSpPr>
-          <p:cNvPr id="119" name="소제목 개발 일정·향후 계획">
+          <p:cNvPr id="119" name="소제목 비즈니스 모델·시장">
             <a:extLst>
               <a:ext uri="{FF2B5EF4-FFF2-40B4-BE49-F238E27FC236}">
                 <a16:creationId xmlns:a16="http://schemas.microsoft.com/office/drawing/2014/main" id="{14565D32-0944-4B2D-AA47-C50D2D612CC4}"/>
@@ -8304,7 +8304,7 @@
                   <a:lin ang="0" scaled="0"/>
                 </a:gradFill>
               </a:rPr>
-              <a:t>개발 일정·향후 계획</a:t>
+              <a:t>비즈니스 모델·시장</a:t>
             </a:r>
             <a:endParaRPr sz="4800">
               <a:gradFill>
@@ -9234,7 +9234,7 @@
       </p:sp>
       <p:sp>
         <p:nvSpPr>
-          <p:cNvPr id="122" name="일정 1주차"/>
+          <p:cNvPr id="122" name="BM 1"/>
           <p:cNvSpPr/>
           <p:nvPr/>
         </p:nvSpPr>
@@ -9290,7 +9290,7 @@
                   <a:srgbClr val="288D26"/>
                 </a:solidFill>
               </a:rPr>
-              <a:t>1주차</a:t>
+              <a:t>무료</a:t>
             </a:r>
           </a:p>
         </p:txBody>
@@ -9324,14 +9324,14 @@
                   <a:srgbClr val="193B22"/>
                 </a:solidFill>
               </a:rPr>
-              <a:t>등기부 요약 파서·데이터 모델·화면 설계</a:t>
-            </a:r>
-          </a:p>
-        </p:txBody>
-      </p:sp>
-      <p:sp>
-        <p:nvSpPr>
-          <p:cNvPr id="125" name="일정 2주차"/>
+              <a:t>계약 전 확인 — 등기부 판정·역전세 지표</a:t>
+            </a:r>
+          </a:p>
+        </p:txBody>
+      </p:sp>
+      <p:sp>
+        <p:nvSpPr>
+          <p:cNvPr id="125" name="BM 2"/>
           <p:cNvSpPr/>
           <p:nvPr/>
         </p:nvSpPr>
@@ -9387,7 +9387,7 @@
                   <a:srgbClr val="288D26"/>
                 </a:solidFill>
               </a:rPr>
-              <a:t>2주차</a:t>
+              <a:t>9,900원</a:t>
             </a:r>
           </a:p>
         </p:txBody>
@@ -9421,14 +9421,14 @@
                   <a:srgbClr val="193B22"/>
                 </a:solidFill>
               </a:rPr>
-              <a:t>판정·연동 규칙·실거래가 API·계약 당일 화면</a:t>
-            </a:r>
-          </a:p>
-        </p:txBody>
-      </p:sp>
-      <p:sp>
-        <p:nvSpPr>
-          <p:cNvPr id="128" name="일정 3주차"/>
+              <a:t>패키지(당일~만기 후 3개월), 다가구·단독 4,900원</a:t>
+            </a:r>
+          </a:p>
+        </p:txBody>
+      </p:sp>
+      <p:sp>
+        <p:nvSpPr>
+          <p:cNvPr id="128" name="BM 3"/>
           <p:cNvSpPr/>
           <p:nvPr/>
         </p:nvSpPr>
@@ -9484,7 +9484,7 @@
                   <a:srgbClr val="288D26"/>
                 </a:solidFill>
               </a:rPr>
-              <a:t>3주차</a:t>
+              <a:t>B2G</a:t>
             </a:r>
           </a:p>
         </p:txBody>
@@ -9518,14 +9518,14 @@
                   <a:srgbClr val="193B22"/>
                 </a:solidFill>
               </a:rPr>
-              <a:t>특약 분기·테스트 결제·알림 이메일·기록함</a:t>
-            </a:r>
-          </a:p>
-        </p:txBody>
-      </p:sp>
-      <p:sp>
-        <p:nvSpPr>
-          <p:cNvPr id="131" name="일정 4주차"/>
+              <a:t>지자체·대학 이용권 (1장 9,900원 기준)</a:t>
+            </a:r>
+          </a:p>
+        </p:txBody>
+      </p:sp>
+      <p:sp>
+        <p:nvSpPr>
+          <p:cNvPr id="131" name="BM 4"/>
           <p:cNvSpPr/>
           <p:nvPr/>
         </p:nvSpPr>
@@ -9581,7 +9581,7 @@
                   <a:srgbClr val="288D26"/>
                 </a:solidFill>
               </a:rPr>
-              <a:t>4주차</a:t>
+              <a:t>시장</a:t>
             </a:r>
           </a:p>
         </p:txBody>
@@ -9615,7 +9615,7 @@
                   <a:srgbClr val="193B22"/>
                 </a:solidFill>
               </a:rPr>
-              <a:t>역전세 경보 재계산·통합·사용성 테스트</a:t>
+              <a:t>부산 전세 43,941건 중 1% ≈ 440건 (가설)</a:t>
             </a:r>
           </a:p>
         </p:txBody>
@@ -9649,7 +9649,7 @@
                   <a:srgbClr val="288D26"/>
                 </a:solidFill>
               </a:rPr>
-              <a:t>향후 계획  </a:t>
+              <a:t xml:space="preserve">첫 고객  </a:t>
             </a:r>
             <a:r>
               <a:rPr sz="2200" b="1" i="0">
@@ -9657,7 +9657,26 @@
                   <a:srgbClr val="193B22"/>
                 </a:solidFill>
               </a:rPr>
-              <a:t>부산 검증 → 수도권 확장, 등기부 OCR, 실결제, B2G 이용권</a:t>
+              <a:t>부산 20~30대 첫 전세 세입자 (대학·청년 주거 기관으로 유입)</a:t>
+            </a:r>
+          </a:p>
+          <a:p>
+            <a:pPr algn="l"/>
+            <a:r>
+              <a:rPr sz="2300" b="1" i="0">
+                <a:solidFill>
+                  <a:srgbClr val="288D26"/>
+                </a:solidFill>
+              </a:rPr>
+              <a:t xml:space="preserve">확장  </a:t>
+            </a:r>
+            <a:r>
+              <a:rPr sz="2200" b="1" i="0">
+                <a:solidFill>
+                  <a:srgbClr val="193B22"/>
+                </a:solidFill>
+              </a:rPr>
+              <a:t>B2G 1곳 연 1,000장 ≈ 990만 원 → 수도권 약 47만 건</a:t>
             </a:r>
           </a:p>
         </p:txBody>

--- a/docs/poster/AI·SW 신기술 전공 프로젝트 발표회_분반_전동기_초안.pptx
+++ b/docs/poster/AI·SW 신기술 전공 프로젝트 발표회_분반_전동기_초안.pptx
@@ -6219,7 +6219,7 @@
       </p:sp>
       <p:sp>
         <p:nvSpPr>
-          <p:cNvPr id="65" name="소제목 핵심 장면 · 특약을 거절당하면 할 일 순서가 바뀝니다">
+          <p:cNvPr id="65" name="소제목 핵심 장면 · 계약 당일 실제로 넣은 특약에 맞춰 할 일이 바뀝니다">
             <a:extLst>
               <a:ext uri="{FF2B5EF4-FFF2-40B4-BE49-F238E27FC236}">
                 <a16:creationId xmlns:a16="http://schemas.microsoft.com/office/drawing/2014/main" id="{14565D32-0944-4B2D-AA47-C50D2D612CC4}"/>
@@ -6264,7 +6264,7 @@
                   <a:lin ang="0" scaled="0"/>
                 </a:gradFill>
               </a:rPr>
-              <a:t>핵심 장면 · 특약을 거절당하면 할 일 순서가 바뀝니다</a:t>
+              <a:t>핵심 장면 · 계약 당일 실제로 넣은 특약에 맞춰 할 일이 바뀝니다</a:t>
             </a:r>
             <a:endParaRPr sz="4800">
               <a:gradFill>

--- a/docs/poster/AI·SW 신기술 전공 프로젝트 발표회_분반_전동기_초안.pptx
+++ b/docs/poster/AI·SW 신기술 전공 프로젝트 발표회_분반_전동기_초안.pptx
@@ -7218,7 +7218,7 @@
       </p:sp>
       <p:sp>
         <p:nvSpPr>
-          <p:cNvPr id="91" name="검증 등기부 요약 추출 정확도"/>
+          <p:cNvPr id="91" name="검증 등기부 요약 추출 항목"/>
           <p:cNvSpPr/>
           <p:nvPr/>
         </p:nvSpPr>
@@ -7274,7 +7274,7 @@
                   <a:srgbClr val="288D26"/>
                 </a:solidFill>
               </a:rPr>
-              <a:t>100%</a:t>
+              <a:t>112/112</a:t>
             </a:r>
           </a:p>
         </p:txBody>
@@ -7308,7 +7308,7 @@
                   <a:srgbClr val="193B22"/>
                 </a:solidFill>
               </a:rPr>
-              <a:t>등기부 요약 추출 정확도</a:t>
+              <a:t>등기부 요약에서 읽은 항목</a:t>
             </a:r>
           </a:p>
           <a:p>
@@ -7319,7 +7319,7 @@
                   <a:srgbClr val="193B22"/>
                 </a:solidFill>
               </a:rPr>
-              <a:t>샘플 10건 112/112 항목</a:t>
+              <a:t>개발용 샘플 10건, 모두 일치</a:t>
             </a:r>
           </a:p>
         </p:txBody>
@@ -8187,7 +8187,7 @@
                   <a:srgbClr val="68746A"/>
                 </a:solidFill>
               </a:rPr>
-              <a:t>※ 등기부 정확도는 파서를 만들며 맞춘 샘플 10건 기준입니다. 빌라 근저당 1,440만 원은 시연용 가상 값입니다.</a:t>
+              <a:t>※ 등기부는 개발용 샘플 기준이며 처음 보는 등기부로 다시 잴 예정입니다. 읽은 값은 확인 화면에서 사용자가 확인·수정합니다. 빌라 근저당 1,440만 원은 시연용 가상 값입니다.</a:t>
             </a:r>
           </a:p>
         </p:txBody>

--- a/docs/poster/AI·SW 신기술 전공 프로젝트 발표회_분반_전동기_초안.pptx
+++ b/docs/poster/AI·SW 신기술 전공 프로젝트 발표회_분반_전동기_초안.pptx
@@ -5,10 +5,10 @@
     <p:sldMasterId id="2147483648" r:id="rId1"/>
   </p:sldMasterIdLst>
   <p:notesMasterIdLst>
-    <p:notesMasterId r:id="rId4"/>
+    <p:notesMasterId r:id="rId3"/>
   </p:notesMasterIdLst>
   <p:sldIdLst>
-    <p:sldId id="257" r:id="rId3"/>
+    <p:sldId id="257" r:id="rId2"/>
   </p:sldIdLst>
   <p:sldSz cx="25199975" cy="50399950"/>
   <p:notesSz cx="6858000" cy="9144000"/>
@@ -295,7 +295,7 @@
 </p:notesMaster>
 </file>
 
-<file path=ppt/notesSlides/notesSlide2.xml><?xml version="1.0" encoding="utf-8"?>
+<file path=ppt/notesSlides/notesSlide1.xml><?xml version="1.0" encoding="utf-8"?>
 <p:notes xmlns:a="http://schemas.openxmlformats.org/drawingml/2006/main" xmlns:r="http://schemas.openxmlformats.org/officeDocument/2006/relationships" xmlns:p="http://schemas.openxmlformats.org/presentationml/2006/main">
   <p:cSld>
     <p:spTree>
@@ -552,7 +552,7 @@
           <a:lstStyle/>
           <a:p>
             <a:fld id="{61A5D779-BE9D-4FDC-B110-A5ADA8610006}" type="datetimeFigureOut">
-              <a:t>2026-10-19</a:t>
+              <a:t>2026-10-27</a:t>
             </a:fld>
             <a:endParaRPr/>
           </a:p>
@@ -757,7 +757,7 @@
           <a:lstStyle/>
           <a:p>
             <a:fld id="{61A5D779-BE9D-4FDC-B110-A5ADA8610006}" type="datetimeFigureOut">
-              <a:t>2026-10-19</a:t>
+              <a:t>2026-10-27</a:t>
             </a:fld>
             <a:endParaRPr/>
           </a:p>
@@ -952,7 +952,7 @@
           <a:lstStyle/>
           <a:p>
             <a:fld id="{61A5D779-BE9D-4FDC-B110-A5ADA8610006}" type="datetimeFigureOut">
-              <a:t>2026-10-19</a:t>
+              <a:t>2026-10-27</a:t>
             </a:fld>
             <a:endParaRPr/>
           </a:p>
@@ -1221,7 +1221,7 @@
           <a:lstStyle/>
           <a:p>
             <a:fld id="{61A5D779-BE9D-4FDC-B110-A5ADA8610006}" type="datetimeFigureOut">
-              <a:t>2026-10-19</a:t>
+              <a:t>2026-10-27</a:t>
             </a:fld>
             <a:endParaRPr/>
           </a:p>
@@ -1488,7 +1488,7 @@
           <a:lstStyle/>
           <a:p>
             <a:fld id="{61A5D779-BE9D-4FDC-B110-A5ADA8610006}" type="datetimeFigureOut">
-              <a:t>2026-10-19</a:t>
+              <a:t>2026-10-27</a:t>
             </a:fld>
             <a:endParaRPr/>
           </a:p>
@@ -1904,7 +1904,7 @@
           <a:lstStyle/>
           <a:p>
             <a:fld id="{61A5D779-BE9D-4FDC-B110-A5ADA8610006}" type="datetimeFigureOut">
-              <a:t>2026-10-19</a:t>
+              <a:t>2026-10-27</a:t>
             </a:fld>
             <a:endParaRPr/>
           </a:p>
@@ -2037,7 +2037,7 @@
           <a:lstStyle/>
           <a:p>
             <a:fld id="{61A5D779-BE9D-4FDC-B110-A5ADA8610006}" type="datetimeFigureOut">
-              <a:t>2026-10-19</a:t>
+              <a:t>2026-10-27</a:t>
             </a:fld>
             <a:endParaRPr/>
           </a:p>
@@ -2143,7 +2143,7 @@
           <a:lstStyle/>
           <a:p>
             <a:fld id="{61A5D779-BE9D-4FDC-B110-A5ADA8610006}" type="datetimeFigureOut">
-              <a:t>2026-10-19</a:t>
+              <a:t>2026-10-27</a:t>
             </a:fld>
             <a:endParaRPr/>
           </a:p>
@@ -2462,7 +2462,7 @@
           <a:lstStyle/>
           <a:p>
             <a:fld id="{61A5D779-BE9D-4FDC-B110-A5ADA8610006}" type="datetimeFigureOut">
-              <a:t>2026-10-19</a:t>
+              <a:t>2026-10-27</a:t>
             </a:fld>
             <a:endParaRPr/>
           </a:p>
@@ -2744,7 +2744,7 @@
           <a:lstStyle/>
           <a:p>
             <a:fld id="{61A5D779-BE9D-4FDC-B110-A5ADA8610006}" type="datetimeFigureOut">
-              <a:t>2026-10-19</a:t>
+              <a:t>2026-10-27</a:t>
             </a:fld>
             <a:endParaRPr/>
           </a:p>
@@ -2983,7 +2983,7 @@
           </a:lstStyle>
           <a:p>
             <a:fld id="{61A5D779-BE9D-4FDC-B110-A5ADA8610006}" type="datetimeFigureOut">
-              <a:t>2026-10-19</a:t>
+              <a:t>2026-10-27</a:t>
             </a:fld>
             <a:endParaRPr/>
           </a:p>
@@ -3385,7 +3385,7 @@
 </p:sldMaster>
 </file>
 
-<file path=ppt/slides/slide2.xml><?xml version="1.0" encoding="utf-8"?>
+<file path=ppt/slides/slide1.xml><?xml version="1.0" encoding="utf-8"?>
 <p:sld xmlns:a="http://schemas.openxmlformats.org/drawingml/2006/main" xmlns:r="http://schemas.openxmlformats.org/officeDocument/2006/relationships" xmlns:p="http://schemas.openxmlformats.org/presentationml/2006/main">
   <p:cSld>
     <p:spTree>
@@ -3535,7 +3535,7 @@
               <a:buNone/>
             </a:pPr>
             <a:r>
-              <a:rPr sz="3800" i="0" b="0">
+              <a:rPr sz="3800" b="0" i="0">
                 <a:solidFill>
                   <a:schemeClr val="bg1">
                     <a:lumMod val="75000"/>
@@ -5198,6 +5198,7 @@
           <a:lstStyle/>
           <a:p>
             <a:pPr algn="ctr"/>
+            <a:endParaRPr/>
           </a:p>
         </p:txBody>
       </p:sp>
@@ -5218,7 +5219,7 @@
           <a:noFill/>
         </p:spPr>
         <p:txBody>
-          <a:bodyPr wrap="square" anchor="ctr" lIns="0" rIns="0" tIns="25400" bIns="25400">
+          <a:bodyPr wrap="square" lIns="0" tIns="25400" rIns="0" bIns="25400" anchor="ctr">
             <a:spAutoFit/>
           </a:bodyPr>
           <a:lstStyle/>
@@ -5252,7 +5253,7 @@
           <a:noFill/>
         </p:spPr>
         <p:txBody>
-          <a:bodyPr wrap="square" anchor="ctr" lIns="0" rIns="0" tIns="25400" bIns="25400">
+          <a:bodyPr wrap="square" lIns="0" tIns="25400" rIns="0" bIns="25400" anchor="ctr">
             <a:spAutoFit/>
           </a:bodyPr>
           <a:lstStyle/>
@@ -5297,7 +5298,7 @@
           <a:noFill/>
         </p:spPr>
         <p:txBody>
-          <a:bodyPr wrap="square" anchor="ctr" lIns="0" rIns="0" tIns="25400" bIns="25400">
+          <a:bodyPr wrap="square" lIns="0" tIns="25400" rIns="0" bIns="25400" anchor="ctr">
             <a:spAutoFit/>
           </a:bodyPr>
           <a:lstStyle/>
@@ -5340,6 +5341,7 @@
           <a:lstStyle/>
           <a:p>
             <a:pPr algn="ctr"/>
+            <a:endParaRPr/>
           </a:p>
         </p:txBody>
       </p:sp>
@@ -5360,7 +5362,7 @@
           <a:noFill/>
         </p:spPr>
         <p:txBody>
-          <a:bodyPr wrap="square" anchor="ctr" lIns="0" rIns="0" tIns="25400" bIns="25400">
+          <a:bodyPr wrap="square" lIns="0" tIns="25400" rIns="0" bIns="25400" anchor="ctr">
             <a:spAutoFit/>
           </a:bodyPr>
           <a:lstStyle/>
@@ -5394,7 +5396,7 @@
           <a:noFill/>
         </p:spPr>
         <p:txBody>
-          <a:bodyPr wrap="square" anchor="ctr" lIns="0" rIns="0" tIns="25400" bIns="25400">
+          <a:bodyPr wrap="square" lIns="0" tIns="25400" rIns="0" bIns="25400" anchor="ctr">
             <a:spAutoFit/>
           </a:bodyPr>
           <a:lstStyle/>
@@ -5439,7 +5441,7 @@
           <a:noFill/>
         </p:spPr>
         <p:txBody>
-          <a:bodyPr wrap="square" anchor="ctr" lIns="0" rIns="0" tIns="25400" bIns="25400">
+          <a:bodyPr wrap="square" lIns="0" tIns="25400" rIns="0" bIns="25400" anchor="ctr">
             <a:spAutoFit/>
           </a:bodyPr>
           <a:lstStyle/>
@@ -5482,6 +5484,7 @@
           <a:lstStyle/>
           <a:p>
             <a:pPr algn="ctr"/>
+            <a:endParaRPr/>
           </a:p>
         </p:txBody>
       </p:sp>
@@ -5502,7 +5505,7 @@
           <a:noFill/>
         </p:spPr>
         <p:txBody>
-          <a:bodyPr wrap="square" anchor="ctr" lIns="0" rIns="0" tIns="25400" bIns="25400">
+          <a:bodyPr wrap="square" lIns="0" tIns="25400" rIns="0" bIns="25400" anchor="ctr">
             <a:spAutoFit/>
           </a:bodyPr>
           <a:lstStyle/>
@@ -5536,7 +5539,7 @@
           <a:noFill/>
         </p:spPr>
         <p:txBody>
-          <a:bodyPr wrap="square" anchor="ctr" lIns="0" rIns="0" tIns="25400" bIns="25400">
+          <a:bodyPr wrap="square" lIns="0" tIns="25400" rIns="0" bIns="25400" anchor="ctr">
             <a:spAutoFit/>
           </a:bodyPr>
           <a:lstStyle/>
@@ -5581,7 +5584,7 @@
           <a:noFill/>
         </p:spPr>
         <p:txBody>
-          <a:bodyPr wrap="square" anchor="ctr" lIns="0" rIns="0" tIns="25400" bIns="25400">
+          <a:bodyPr wrap="square" lIns="0" tIns="25400" rIns="0" bIns="25400" anchor="ctr">
             <a:spAutoFit/>
           </a:bodyPr>
           <a:lstStyle/>
@@ -5624,6 +5627,7 @@
           <a:lstStyle/>
           <a:p>
             <a:pPr algn="ctr"/>
+            <a:endParaRPr/>
           </a:p>
         </p:txBody>
       </p:sp>
@@ -5644,7 +5648,7 @@
           <a:noFill/>
         </p:spPr>
         <p:txBody>
-          <a:bodyPr wrap="square" anchor="ctr" lIns="0" rIns="0" tIns="25400" bIns="25400">
+          <a:bodyPr wrap="square" lIns="0" tIns="25400" rIns="0" bIns="25400" anchor="ctr">
             <a:spAutoFit/>
           </a:bodyPr>
           <a:lstStyle/>
@@ -5678,7 +5682,7 @@
           <a:noFill/>
         </p:spPr>
         <p:txBody>
-          <a:bodyPr wrap="square" anchor="ctr" lIns="0" rIns="0" tIns="25400" bIns="25400">
+          <a:bodyPr wrap="square" lIns="0" tIns="25400" rIns="0" bIns="25400" anchor="ctr">
             <a:spAutoFit/>
           </a:bodyPr>
           <a:lstStyle/>
@@ -5732,7 +5736,7 @@
           </a:ln>
         </p:spPr>
         <p:txBody>
-          <a:bodyPr rtlCol="0" anchor="ctr" wrap="square" lIns="76200" rIns="76200" tIns="25400" bIns="25400"/>
+          <a:bodyPr wrap="square" lIns="76200" tIns="25400" rIns="76200" bIns="25400" rtlCol="0" anchor="ctr"/>
           <a:lstStyle/>
           <a:p>
             <a:pPr algn="ctr"/>
@@ -5782,7 +5786,7 @@
           </a:ln>
         </p:spPr>
         <p:txBody>
-          <a:bodyPr rtlCol="0" anchor="ctr" wrap="square" lIns="76200" rIns="76200" tIns="25400" bIns="25400"/>
+          <a:bodyPr wrap="square" lIns="76200" tIns="25400" rIns="76200" bIns="25400" rtlCol="0" anchor="ctr"/>
           <a:lstStyle/>
           <a:p>
             <a:pPr algn="ctr"/>
@@ -5834,7 +5838,7 @@
           </a:ln>
         </p:spPr>
         <p:txBody>
-          <a:bodyPr rtlCol="0" anchor="ctr" wrap="square" lIns="76200" rIns="76200" tIns="25400" bIns="25400"/>
+          <a:bodyPr wrap="square" lIns="76200" tIns="25400" rIns="76200" bIns="25400" rtlCol="0" anchor="ctr"/>
           <a:lstStyle/>
           <a:p>
             <a:pPr algn="ctr"/>
@@ -5908,7 +5912,7 @@
           </a:ln>
         </p:spPr>
         <p:txBody>
-          <a:bodyPr rtlCol="0" anchor="ctr" wrap="square" lIns="76200" rIns="76200" tIns="25400" bIns="25400"/>
+          <a:bodyPr wrap="square" lIns="76200" tIns="25400" rIns="76200" bIns="25400" rtlCol="0" anchor="ctr"/>
           <a:lstStyle/>
           <a:p>
             <a:pPr algn="ctr"/>
@@ -5982,7 +5986,7 @@
           </a:ln>
         </p:spPr>
         <p:txBody>
-          <a:bodyPr rtlCol="0" anchor="ctr" wrap="square" lIns="76200" rIns="76200" tIns="25400" bIns="25400"/>
+          <a:bodyPr wrap="square" lIns="76200" tIns="25400" rIns="76200" bIns="25400" rtlCol="0" anchor="ctr"/>
           <a:lstStyle/>
           <a:p>
             <a:pPr algn="ctr"/>
@@ -6056,7 +6060,7 @@
           </a:ln>
         </p:spPr>
         <p:txBody>
-          <a:bodyPr rtlCol="0" anchor="ctr" wrap="square" lIns="76200" rIns="76200" tIns="25400" bIns="25400"/>
+          <a:bodyPr wrap="square" lIns="76200" tIns="25400" rIns="76200" bIns="25400" rtlCol="0" anchor="ctr"/>
           <a:lstStyle/>
           <a:p>
             <a:pPr algn="ctr"/>
@@ -6144,7 +6148,7 @@
           <a:noFill/>
         </p:spPr>
         <p:txBody>
-          <a:bodyPr wrap="square" anchor="t" lIns="0" rIns="0" tIns="25400" bIns="25400">
+          <a:bodyPr wrap="square" lIns="0" tIns="25400" rIns="0" bIns="25400" anchor="t">
             <a:spAutoFit/>
           </a:bodyPr>
           <a:lstStyle/>
@@ -6189,7 +6193,7 @@
           <a:noFill/>
         </p:spPr>
         <p:txBody>
-          <a:bodyPr wrap="square" anchor="t" lIns="0" rIns="0" tIns="25400" bIns="25400">
+          <a:bodyPr wrap="square" lIns="0" tIns="25400" rIns="0" bIns="25400" anchor="t">
             <a:spAutoFit/>
           </a:bodyPr>
           <a:lstStyle/>
@@ -6299,7 +6303,7 @@
           <a:noFill/>
         </p:spPr>
         <p:txBody>
-          <a:bodyPr wrap="square" anchor="ctr" lIns="0" rIns="0" tIns="25400" bIns="25400">
+          <a:bodyPr wrap="square" lIns="0" tIns="25400" rIns="0" bIns="25400" anchor="ctr">
             <a:spAutoFit/>
           </a:bodyPr>
           <a:lstStyle/>
@@ -6362,6 +6366,7 @@
           <a:lstStyle/>
           <a:p>
             <a:pPr algn="ctr"/>
+            <a:endParaRPr/>
           </a:p>
         </p:txBody>
       </p:sp>
@@ -6387,7 +6392,7 @@
           </a:ln>
         </p:spPr>
         <p:txBody>
-          <a:bodyPr rtlCol="0" anchor="ctr" wrap="square" lIns="76200" rIns="76200" tIns="25400" bIns="25400"/>
+          <a:bodyPr wrap="square" lIns="76200" tIns="25400" rIns="76200" bIns="25400" rtlCol="0" anchor="ctr"/>
           <a:lstStyle/>
           <a:p>
             <a:pPr algn="ctr"/>
@@ -6419,7 +6424,7 @@
           <a:noFill/>
         </p:spPr>
         <p:txBody>
-          <a:bodyPr wrap="square" anchor="ctr" lIns="0" rIns="0" tIns="25400" bIns="25400">
+          <a:bodyPr wrap="square" lIns="0" tIns="25400" rIns="0" bIns="25400" anchor="ctr">
             <a:spAutoFit/>
           </a:bodyPr>
           <a:lstStyle/>
@@ -6453,7 +6458,7 @@
           <a:noFill/>
         </p:spPr>
         <p:txBody>
-          <a:bodyPr wrap="square" anchor="ctr" lIns="0" rIns="0" tIns="25400" bIns="25400">
+          <a:bodyPr wrap="square" lIns="0" tIns="25400" rIns="0" bIns="25400" anchor="ctr">
             <a:spAutoFit/>
           </a:bodyPr>
           <a:lstStyle/>
@@ -6487,7 +6492,7 @@
           <a:noFill/>
         </p:spPr>
         <p:txBody>
-          <a:bodyPr wrap="square" anchor="ctr" lIns="0" rIns="0" tIns="25400" bIns="25400">
+          <a:bodyPr wrap="square" lIns="0" tIns="25400" rIns="0" bIns="25400" anchor="ctr">
             <a:spAutoFit/>
           </a:bodyPr>
           <a:lstStyle/>
@@ -6521,7 +6526,7 @@
           <a:noFill/>
         </p:spPr>
         <p:txBody>
-          <a:bodyPr wrap="square" anchor="ctr" lIns="0" rIns="0" tIns="25400" bIns="25400">
+          <a:bodyPr wrap="square" lIns="0" tIns="25400" rIns="0" bIns="25400" anchor="ctr">
             <a:spAutoFit/>
           </a:bodyPr>
           <a:lstStyle/>
@@ -6555,7 +6560,7 @@
           <a:noFill/>
         </p:spPr>
         <p:txBody>
-          <a:bodyPr wrap="square" anchor="ctr" lIns="0" rIns="0" tIns="25400" bIns="25400">
+          <a:bodyPr wrap="square" lIns="0" tIns="25400" rIns="0" bIns="25400" anchor="ctr">
             <a:spAutoFit/>
           </a:bodyPr>
           <a:lstStyle/>
@@ -6589,7 +6594,7 @@
           <a:noFill/>
         </p:spPr>
         <p:txBody>
-          <a:bodyPr wrap="square" anchor="t" lIns="0" rIns="0" tIns="25400" bIns="25400">
+          <a:bodyPr wrap="square" lIns="0" tIns="25400" rIns="0" bIns="25400" anchor="t">
             <a:spAutoFit/>
           </a:bodyPr>
           <a:lstStyle/>
@@ -6623,7 +6628,7 @@
           <a:noFill/>
         </p:spPr>
         <p:txBody>
-          <a:bodyPr wrap="square" anchor="ctr" lIns="0" rIns="0" tIns="25400" bIns="25400">
+          <a:bodyPr wrap="square" lIns="0" tIns="25400" rIns="0" bIns="25400" anchor="ctr">
             <a:spAutoFit/>
           </a:bodyPr>
           <a:lstStyle/>
@@ -6670,6 +6675,7 @@
           <a:lstStyle/>
           <a:p>
             <a:pPr algn="ctr"/>
+            <a:endParaRPr/>
           </a:p>
         </p:txBody>
       </p:sp>
@@ -6695,7 +6701,7 @@
           </a:ln>
         </p:spPr>
         <p:txBody>
-          <a:bodyPr rtlCol="0" anchor="ctr" wrap="square" lIns="76200" rIns="76200" tIns="25400" bIns="25400"/>
+          <a:bodyPr wrap="square" lIns="76200" tIns="25400" rIns="76200" bIns="25400" rtlCol="0" anchor="ctr"/>
           <a:lstStyle/>
           <a:p>
             <a:pPr algn="ctr"/>
@@ -6736,6 +6742,7 @@
           <a:lstStyle/>
           <a:p>
             <a:pPr algn="ctr"/>
+            <a:endParaRPr/>
           </a:p>
         </p:txBody>
       </p:sp>
@@ -6756,7 +6763,7 @@
           <a:noFill/>
         </p:spPr>
         <p:txBody>
-          <a:bodyPr wrap="square" anchor="ctr" lIns="0" rIns="0" tIns="25400" bIns="25400">
+          <a:bodyPr wrap="square" lIns="0" tIns="25400" rIns="0" bIns="25400" anchor="ctr">
             <a:spAutoFit/>
           </a:bodyPr>
           <a:lstStyle/>
@@ -6790,7 +6797,7 @@
           <a:noFill/>
         </p:spPr>
         <p:txBody>
-          <a:bodyPr wrap="square" anchor="ctr" lIns="0" rIns="0" tIns="25400" bIns="25400">
+          <a:bodyPr wrap="square" lIns="0" tIns="25400" rIns="0" bIns="25400" anchor="ctr">
             <a:spAutoFit/>
           </a:bodyPr>
           <a:lstStyle/>
@@ -6824,7 +6831,7 @@
           <a:noFill/>
         </p:spPr>
         <p:txBody>
-          <a:bodyPr wrap="square" anchor="ctr" lIns="0" rIns="0" tIns="25400" bIns="25400">
+          <a:bodyPr wrap="square" lIns="0" tIns="25400" rIns="0" bIns="25400" anchor="ctr">
             <a:spAutoFit/>
           </a:bodyPr>
           <a:lstStyle/>
@@ -6858,7 +6865,7 @@
           <a:noFill/>
         </p:spPr>
         <p:txBody>
-          <a:bodyPr wrap="square" anchor="ctr" lIns="0" rIns="0" tIns="25400" bIns="25400">
+          <a:bodyPr wrap="square" lIns="0" tIns="25400" rIns="0" bIns="25400" anchor="ctr">
             <a:spAutoFit/>
           </a:bodyPr>
           <a:lstStyle/>
@@ -6892,7 +6899,7 @@
           <a:noFill/>
         </p:spPr>
         <p:txBody>
-          <a:bodyPr wrap="square" anchor="ctr" lIns="0" rIns="0" tIns="25400" bIns="25400">
+          <a:bodyPr wrap="square" lIns="0" tIns="25400" rIns="0" bIns="25400" anchor="ctr">
             <a:spAutoFit/>
           </a:bodyPr>
           <a:lstStyle/>
@@ -6926,7 +6933,7 @@
           <a:noFill/>
         </p:spPr>
         <p:txBody>
-          <a:bodyPr wrap="square" anchor="t" lIns="0" rIns="0" tIns="25400" bIns="25400">
+          <a:bodyPr wrap="square" lIns="0" tIns="25400" rIns="0" bIns="25400" anchor="t">
             <a:spAutoFit/>
           </a:bodyPr>
           <a:lstStyle/>
@@ -6945,59 +6952,6 @@
       </p:sp>
       <p:sp>
         <p:nvSpPr>
-          <p:cNvPr id="85" name="앱 화면 계약 당일 체크"/>
-          <p:cNvSpPr/>
-          <p:nvPr/>
-        </p:nvSpPr>
-        <p:spPr>
-          <a:xfrm>
-            <a:off x="15875000" y="29718000"/>
-            <a:ext cx="2413000" cy="4191000"/>
-          </a:xfrm>
-          <a:prstGeom prst="roundRect">
-            <a:avLst>
-              <a:gd name="adj" fmla="val 12000"/>
-            </a:avLst>
-          </a:prstGeom>
-          <a:solidFill>
-            <a:srgbClr val="F6F8F6"/>
-          </a:solidFill>
-          <a:ln w="28575">
-            <a:solidFill>
-              <a:srgbClr val="AAD49D"/>
-            </a:solidFill>
-            <a:prstDash val="dash"/>
-          </a:ln>
-        </p:spPr>
-        <p:txBody>
-          <a:bodyPr rtlCol="0" anchor="ctr" wrap="square" lIns="76200" rIns="76200" tIns="25400" bIns="25400"/>
-          <a:lstStyle/>
-          <a:p>
-            <a:pPr algn="ctr"/>
-            <a:r>
-              <a:rPr sz="2200" b="1" i="0">
-                <a:solidFill>
-                  <a:srgbClr val="68746A"/>
-                </a:solidFill>
-              </a:rPr>
-              <a:t>앱 화면</a:t>
-            </a:r>
-          </a:p>
-          <a:p>
-            <a:pPr algn="ctr"/>
-            <a:r>
-              <a:rPr sz="1800" b="0" i="0">
-                <a:solidFill>
-                  <a:srgbClr val="68746A"/>
-                </a:solidFill>
-              </a:rPr>
-              <a:t>스크린샷 자리</a:t>
-            </a:r>
-          </a:p>
-        </p:txBody>
-      </p:sp>
-      <p:sp>
-        <p:nvSpPr>
           <p:cNvPr id="86" name="TextBox 85"/>
           <p:cNvSpPr txBox="1"/>
           <p:nvPr/>
@@ -7013,7 +6967,7 @@
           <a:noFill/>
         </p:spPr>
         <p:txBody>
-          <a:bodyPr wrap="square" anchor="ctr" lIns="0" rIns="0" tIns="25400" bIns="25400">
+          <a:bodyPr wrap="square" lIns="0" tIns="25400" rIns="0" bIns="25400" anchor="ctr">
             <a:spAutoFit/>
           </a:bodyPr>
           <a:lstStyle/>
@@ -7032,59 +6986,6 @@
       </p:sp>
       <p:sp>
         <p:nvSpPr>
-          <p:cNvPr id="87" name="앱 화면 바뀐 할 일 목록"/>
-          <p:cNvSpPr/>
-          <p:nvPr/>
-        </p:nvSpPr>
-        <p:spPr>
-          <a:xfrm>
-            <a:off x="19558000" y="29718000"/>
-            <a:ext cx="2413000" cy="4191000"/>
-          </a:xfrm>
-          <a:prstGeom prst="roundRect">
-            <a:avLst>
-              <a:gd name="adj" fmla="val 12000"/>
-            </a:avLst>
-          </a:prstGeom>
-          <a:solidFill>
-            <a:srgbClr val="F6F8F6"/>
-          </a:solidFill>
-          <a:ln w="28575">
-            <a:solidFill>
-              <a:srgbClr val="AAD49D"/>
-            </a:solidFill>
-            <a:prstDash val="dash"/>
-          </a:ln>
-        </p:spPr>
-        <p:txBody>
-          <a:bodyPr rtlCol="0" anchor="ctr" wrap="square" lIns="76200" rIns="76200" tIns="25400" bIns="25400"/>
-          <a:lstStyle/>
-          <a:p>
-            <a:pPr algn="ctr"/>
-            <a:r>
-              <a:rPr sz="2200" b="1" i="0">
-                <a:solidFill>
-                  <a:srgbClr val="68746A"/>
-                </a:solidFill>
-              </a:rPr>
-              <a:t>앱 화면</a:t>
-            </a:r>
-          </a:p>
-          <a:p>
-            <a:pPr algn="ctr"/>
-            <a:r>
-              <a:rPr sz="1800" b="0" i="0">
-                <a:solidFill>
-                  <a:srgbClr val="68746A"/>
-                </a:solidFill>
-              </a:rPr>
-              <a:t>스크린샷 자리</a:t>
-            </a:r>
-          </a:p>
-        </p:txBody>
-      </p:sp>
-      <p:sp>
-        <p:nvSpPr>
           <p:cNvPr id="88" name="TextBox 87"/>
           <p:cNvSpPr txBox="1"/>
           <p:nvPr/>
@@ -7100,7 +7001,7 @@
           <a:noFill/>
         </p:spPr>
         <p:txBody>
-          <a:bodyPr wrap="square" anchor="ctr" lIns="0" rIns="0" tIns="25400" bIns="25400">
+          <a:bodyPr wrap="square" lIns="0" tIns="25400" rIns="0" bIns="25400" anchor="ctr">
             <a:spAutoFit/>
           </a:bodyPr>
           <a:lstStyle/>
@@ -7134,7 +7035,7 @@
           <a:noFill/>
         </p:spPr>
         <p:txBody>
-          <a:bodyPr wrap="square" anchor="ctr" lIns="0" rIns="0" tIns="25400" bIns="25400">
+          <a:bodyPr wrap="square" lIns="0" tIns="25400" rIns="0" bIns="25400" anchor="ctr">
             <a:spAutoFit/>
           </a:bodyPr>
           <a:lstStyle/>
@@ -7242,6 +7143,7 @@
           <a:lstStyle/>
           <a:p>
             <a:pPr algn="ctr"/>
+            <a:endParaRPr/>
           </a:p>
         </p:txBody>
       </p:sp>
@@ -7262,7 +7164,7 @@
           <a:noFill/>
         </p:spPr>
         <p:txBody>
-          <a:bodyPr wrap="square" anchor="ctr" lIns="0" rIns="0" tIns="25400" bIns="25400">
+          <a:bodyPr wrap="square" lIns="0" tIns="25400" rIns="0" bIns="25400" anchor="ctr">
             <a:spAutoFit/>
           </a:bodyPr>
           <a:lstStyle/>
@@ -7296,7 +7198,7 @@
           <a:noFill/>
         </p:spPr>
         <p:txBody>
-          <a:bodyPr wrap="square" anchor="ctr" lIns="0" rIns="0" tIns="25400" bIns="25400">
+          <a:bodyPr wrap="square" lIns="0" tIns="25400" rIns="0" bIns="25400" anchor="ctr">
             <a:spAutoFit/>
           </a:bodyPr>
           <a:lstStyle/>
@@ -7350,6 +7252,7 @@
           <a:lstStyle/>
           <a:p>
             <a:pPr algn="ctr"/>
+            <a:endParaRPr/>
           </a:p>
         </p:txBody>
       </p:sp>
@@ -7370,7 +7273,7 @@
           <a:noFill/>
         </p:spPr>
         <p:txBody>
-          <a:bodyPr wrap="square" anchor="ctr" lIns="0" rIns="0" tIns="25400" bIns="25400">
+          <a:bodyPr wrap="square" lIns="0" tIns="25400" rIns="0" bIns="25400" anchor="ctr">
             <a:spAutoFit/>
           </a:bodyPr>
           <a:lstStyle/>
@@ -7404,7 +7307,7 @@
           <a:noFill/>
         </p:spPr>
         <p:txBody>
-          <a:bodyPr wrap="square" anchor="ctr" lIns="0" rIns="0" tIns="25400" bIns="25400">
+          <a:bodyPr wrap="square" lIns="0" tIns="25400" rIns="0" bIns="25400" anchor="ctr">
             <a:spAutoFit/>
           </a:bodyPr>
           <a:lstStyle/>
@@ -7458,6 +7361,7 @@
           <a:lstStyle/>
           <a:p>
             <a:pPr algn="ctr"/>
+            <a:endParaRPr/>
           </a:p>
         </p:txBody>
       </p:sp>
@@ -7478,7 +7382,7 @@
           <a:noFill/>
         </p:spPr>
         <p:txBody>
-          <a:bodyPr wrap="square" anchor="ctr" lIns="0" rIns="0" tIns="25400" bIns="25400">
+          <a:bodyPr wrap="square" lIns="0" tIns="25400" rIns="0" bIns="25400" anchor="ctr">
             <a:spAutoFit/>
           </a:bodyPr>
           <a:lstStyle/>
@@ -7512,7 +7416,7 @@
           <a:noFill/>
         </p:spPr>
         <p:txBody>
-          <a:bodyPr wrap="square" anchor="ctr" lIns="0" rIns="0" tIns="25400" bIns="25400">
+          <a:bodyPr wrap="square" lIns="0" tIns="25400" rIns="0" bIns="25400" anchor="ctr">
             <a:spAutoFit/>
           </a:bodyPr>
           <a:lstStyle/>
@@ -7557,7 +7461,7 @@
           <a:noFill/>
         </p:spPr>
         <p:txBody>
-          <a:bodyPr wrap="square" anchor="ctr" lIns="0" rIns="0" tIns="25400" bIns="25400">
+          <a:bodyPr wrap="square" lIns="0" tIns="25400" rIns="0" bIns="25400" anchor="ctr">
             <a:spAutoFit/>
           </a:bodyPr>
           <a:lstStyle/>
@@ -7596,7 +7500,7 @@
           </a:ln>
         </p:spPr>
         <p:txBody>
-          <a:bodyPr rtlCol="0" anchor="ctr" wrap="square" lIns="0" rIns="0" tIns="25400" bIns="25400"/>
+          <a:bodyPr wrap="square" lIns="0" tIns="25400" rIns="0" bIns="25400" rtlCol="0" anchor="ctr"/>
           <a:lstStyle/>
           <a:p>
             <a:pPr algn="ctr"/>
@@ -7633,7 +7537,7 @@
           </a:ln>
         </p:spPr>
         <p:txBody>
-          <a:bodyPr rtlCol="0" anchor="ctr" wrap="square" lIns="0" rIns="0" tIns="25400" bIns="25400"/>
+          <a:bodyPr wrap="square" lIns="0" tIns="25400" rIns="0" bIns="25400" rtlCol="0" anchor="ctr"/>
           <a:lstStyle/>
           <a:p>
             <a:pPr algn="ctr"/>
@@ -7670,7 +7574,7 @@
           </a:ln>
         </p:spPr>
         <p:txBody>
-          <a:bodyPr rtlCol="0" anchor="ctr" wrap="square" lIns="0" rIns="0" tIns="25400" bIns="25400"/>
+          <a:bodyPr wrap="square" lIns="0" tIns="25400" rIns="0" bIns="25400" rtlCol="0" anchor="ctr"/>
           <a:lstStyle/>
           <a:p>
             <a:pPr algn="ctr"/>
@@ -7707,7 +7611,7 @@
           </a:ln>
         </p:spPr>
         <p:txBody>
-          <a:bodyPr rtlCol="0" anchor="ctr" wrap="square" lIns="0" rIns="0" tIns="25400" bIns="25400"/>
+          <a:bodyPr wrap="square" lIns="0" tIns="25400" rIns="0" bIns="25400" rtlCol="0" anchor="ctr"/>
           <a:lstStyle/>
           <a:p>
             <a:pPr algn="ctr"/>
@@ -7739,7 +7643,7 @@
           <a:noFill/>
         </p:spPr>
         <p:txBody>
-          <a:bodyPr wrap="square" anchor="ctr" lIns="0" rIns="0" tIns="25400" bIns="25400">
+          <a:bodyPr wrap="square" lIns="0" tIns="25400" rIns="0" bIns="25400" anchor="ctr">
             <a:spAutoFit/>
           </a:bodyPr>
           <a:lstStyle/>
@@ -7773,7 +7677,7 @@
           <a:noFill/>
         </p:spPr>
         <p:txBody>
-          <a:bodyPr wrap="square" anchor="ctr" lIns="0" rIns="0" tIns="25400" bIns="25400">
+          <a:bodyPr wrap="square" lIns="0" tIns="25400" rIns="0" bIns="25400" anchor="ctr">
             <a:spAutoFit/>
           </a:bodyPr>
           <a:lstStyle/>
@@ -7807,7 +7711,7 @@
           <a:noFill/>
         </p:spPr>
         <p:txBody>
-          <a:bodyPr wrap="square" anchor="ctr" lIns="0" rIns="0" tIns="25400" bIns="25400">
+          <a:bodyPr wrap="square" lIns="0" tIns="25400" rIns="0" bIns="25400" anchor="ctr">
             <a:spAutoFit/>
           </a:bodyPr>
           <a:lstStyle/>
@@ -7841,7 +7745,7 @@
           <a:noFill/>
         </p:spPr>
         <p:txBody>
-          <a:bodyPr wrap="square" anchor="ctr" lIns="0" rIns="0" tIns="25400" bIns="25400">
+          <a:bodyPr wrap="square" lIns="0" tIns="25400" rIns="0" bIns="25400" anchor="ctr">
             <a:spAutoFit/>
           </a:bodyPr>
           <a:lstStyle/>
@@ -7884,6 +7788,7 @@
           <a:lstStyle/>
           <a:p>
             <a:pPr algn="ctr"/>
+            <a:endParaRPr/>
           </a:p>
         </p:txBody>
       </p:sp>
@@ -7904,7 +7809,7 @@
           <a:noFill/>
         </p:spPr>
         <p:txBody>
-          <a:bodyPr wrap="square" anchor="ctr" lIns="0" rIns="0" tIns="25400" bIns="25400">
+          <a:bodyPr wrap="square" lIns="0" tIns="25400" rIns="0" bIns="25400" anchor="ctr">
             <a:spAutoFit/>
           </a:bodyPr>
           <a:lstStyle/>
@@ -7947,6 +7852,7 @@
           <a:lstStyle/>
           <a:p>
             <a:pPr algn="ctr"/>
+            <a:endParaRPr/>
           </a:p>
         </p:txBody>
       </p:sp>
@@ -7967,7 +7873,7 @@
           <a:noFill/>
         </p:spPr>
         <p:txBody>
-          <a:bodyPr wrap="square" anchor="ctr" lIns="0" rIns="0" tIns="25400" bIns="25400">
+          <a:bodyPr wrap="square" lIns="0" tIns="25400" rIns="0" bIns="25400" anchor="ctr">
             <a:spAutoFit/>
           </a:bodyPr>
           <a:lstStyle/>
@@ -7986,59 +7892,6 @@
       </p:sp>
       <p:sp>
         <p:nvSpPr>
-          <p:cNvPr id="113" name="앱 화면 판정 결과"/>
-          <p:cNvSpPr/>
-          <p:nvPr/>
-        </p:nvSpPr>
-        <p:spPr>
-          <a:xfrm>
-            <a:off x="15875000" y="36423600"/>
-            <a:ext cx="2413000" cy="4191000"/>
-          </a:xfrm>
-          <a:prstGeom prst="roundRect">
-            <a:avLst>
-              <a:gd name="adj" fmla="val 12000"/>
-            </a:avLst>
-          </a:prstGeom>
-          <a:solidFill>
-            <a:srgbClr val="F6F8F6"/>
-          </a:solidFill>
-          <a:ln w="28575">
-            <a:solidFill>
-              <a:srgbClr val="AAD49D"/>
-            </a:solidFill>
-            <a:prstDash val="dash"/>
-          </a:ln>
-        </p:spPr>
-        <p:txBody>
-          <a:bodyPr rtlCol="0" anchor="ctr" wrap="square" lIns="76200" rIns="76200" tIns="25400" bIns="25400"/>
-          <a:lstStyle/>
-          <a:p>
-            <a:pPr algn="ctr"/>
-            <a:r>
-              <a:rPr sz="2200" b="1" i="0">
-                <a:solidFill>
-                  <a:srgbClr val="68746A"/>
-                </a:solidFill>
-              </a:rPr>
-              <a:t>앱 화면</a:t>
-            </a:r>
-          </a:p>
-          <a:p>
-            <a:pPr algn="ctr"/>
-            <a:r>
-              <a:rPr sz="1800" b="0" i="0">
-                <a:solidFill>
-                  <a:srgbClr val="68746A"/>
-                </a:solidFill>
-              </a:rPr>
-              <a:t>스크린샷 자리</a:t>
-            </a:r>
-          </a:p>
-        </p:txBody>
-      </p:sp>
-      <p:sp>
-        <p:nvSpPr>
           <p:cNvPr id="114" name="TextBox 113"/>
           <p:cNvSpPr txBox="1"/>
           <p:nvPr/>
@@ -8054,7 +7907,7 @@
           <a:noFill/>
         </p:spPr>
         <p:txBody>
-          <a:bodyPr wrap="square" anchor="ctr" lIns="0" rIns="0" tIns="25400" bIns="25400">
+          <a:bodyPr wrap="square" lIns="0" tIns="25400" rIns="0" bIns="25400" anchor="ctr">
             <a:spAutoFit/>
           </a:bodyPr>
           <a:lstStyle/>
@@ -8073,59 +7926,6 @@
       </p:sp>
       <p:sp>
         <p:nvSpPr>
-          <p:cNvPr id="115" name="앱 화면 역전세 경보"/>
-          <p:cNvSpPr/>
-          <p:nvPr/>
-        </p:nvSpPr>
-        <p:spPr>
-          <a:xfrm>
-            <a:off x="19558000" y="36423600"/>
-            <a:ext cx="2413000" cy="4191000"/>
-          </a:xfrm>
-          <a:prstGeom prst="roundRect">
-            <a:avLst>
-              <a:gd name="adj" fmla="val 12000"/>
-            </a:avLst>
-          </a:prstGeom>
-          <a:solidFill>
-            <a:srgbClr val="F6F8F6"/>
-          </a:solidFill>
-          <a:ln w="28575">
-            <a:solidFill>
-              <a:srgbClr val="AAD49D"/>
-            </a:solidFill>
-            <a:prstDash val="dash"/>
-          </a:ln>
-        </p:spPr>
-        <p:txBody>
-          <a:bodyPr rtlCol="0" anchor="ctr" wrap="square" lIns="76200" rIns="76200" tIns="25400" bIns="25400"/>
-          <a:lstStyle/>
-          <a:p>
-            <a:pPr algn="ctr"/>
-            <a:r>
-              <a:rPr sz="2200" b="1" i="0">
-                <a:solidFill>
-                  <a:srgbClr val="68746A"/>
-                </a:solidFill>
-              </a:rPr>
-              <a:t>앱 화면</a:t>
-            </a:r>
-          </a:p>
-          <a:p>
-            <a:pPr algn="ctr"/>
-            <a:r>
-              <a:rPr sz="1800" b="0" i="0">
-                <a:solidFill>
-                  <a:srgbClr val="68746A"/>
-                </a:solidFill>
-              </a:rPr>
-              <a:t>스크린샷 자리</a:t>
-            </a:r>
-          </a:p>
-        </p:txBody>
-      </p:sp>
-      <p:sp>
-        <p:nvSpPr>
           <p:cNvPr id="116" name="TextBox 115"/>
           <p:cNvSpPr txBox="1"/>
           <p:nvPr/>
@@ -8141,7 +7941,7 @@
           <a:noFill/>
         </p:spPr>
         <p:txBody>
-          <a:bodyPr wrap="square" anchor="ctr" lIns="0" rIns="0" tIns="25400" bIns="25400">
+          <a:bodyPr wrap="square" lIns="0" tIns="25400" rIns="0" bIns="25400" anchor="ctr">
             <a:spAutoFit/>
           </a:bodyPr>
           <a:lstStyle/>
@@ -8175,7 +7975,7 @@
           <a:noFill/>
         </p:spPr>
         <p:txBody>
-          <a:bodyPr wrap="square" anchor="ctr" lIns="0" rIns="0" tIns="25400" bIns="25400">
+          <a:bodyPr wrap="square" lIns="0" tIns="25400" rIns="0" bIns="25400" anchor="ctr">
             <a:spAutoFit/>
           </a:bodyPr>
           <a:lstStyle/>
@@ -8337,28 +8137,45 @@
         <a:graphic>
           <a:graphicData uri="http://schemas.openxmlformats.org/drawingml/2006/table">
             <a:tbl>
-              <a:tblPr firstRow="0" bandRow="0"/>
+              <a:tblPr/>
               <a:tblGrid>
-                <a:gridCol w="2159000"/>
-                <a:gridCol w="2921000"/>
-                <a:gridCol w="2794000"/>
-                <a:gridCol w="3810000"/>
+                <a:gridCol w="2159000">
+                  <a:extLst>
+                    <a:ext uri="{9D8B030D-6E8A-4147-A177-3AD203B41FA5}">
+                      <a16:colId xmlns:a16="http://schemas.microsoft.com/office/drawing/2014/main" val="20000"/>
+                    </a:ext>
+                  </a:extLst>
+                </a:gridCol>
+                <a:gridCol w="2921000">
+                  <a:extLst>
+                    <a:ext uri="{9D8B030D-6E8A-4147-A177-3AD203B41FA5}">
+                      <a16:colId xmlns:a16="http://schemas.microsoft.com/office/drawing/2014/main" val="20001"/>
+                    </a:ext>
+                  </a:extLst>
+                </a:gridCol>
+                <a:gridCol w="2794000">
+                  <a:extLst>
+                    <a:ext uri="{9D8B030D-6E8A-4147-A177-3AD203B41FA5}">
+                      <a16:colId xmlns:a16="http://schemas.microsoft.com/office/drawing/2014/main" val="20002"/>
+                    </a:ext>
+                  </a:extLst>
+                </a:gridCol>
+                <a:gridCol w="3810000">
+                  <a:extLst>
+                    <a:ext uri="{9D8B030D-6E8A-4147-A177-3AD203B41FA5}">
+                      <a16:colId xmlns:a16="http://schemas.microsoft.com/office/drawing/2014/main" val="20003"/>
+                    </a:ext>
+                  </a:extLst>
+                </a:gridCol>
               </a:tblGrid>
               <a:tr h="787400">
                 <a:tc>
                   <a:txBody>
-                    <a:bodyPr wrap="square" anchor="ctr" lIns="63500" rIns="63500" tIns="25400" bIns="25400"/>
+                    <a:bodyPr/>
                     <a:lstStyle/>
                     <a:p>
                       <a:pPr algn="ctr"/>
-                      <a:r>
-                        <a:rPr sz="2200" b="1" i="0">
-                          <a:solidFill>
-                            <a:srgbClr val="FFFFFF"/>
-                          </a:solidFill>
-                        </a:rPr>
-                        <a:t/>
-                      </a:r>
+                      <a:endParaRPr/>
                     </a:p>
                   </a:txBody>
                   <a:tcPr marL="63500" marR="63500" marT="25400" marB="25400" anchor="ctr">
@@ -8389,7 +8206,7 @@
                 </a:tc>
                 <a:tc>
                   <a:txBody>
-                    <a:bodyPr wrap="square" anchor="ctr" lIns="63500" rIns="63500" tIns="25400" bIns="25400"/>
+                    <a:bodyPr/>
                     <a:lstStyle/>
                     <a:p>
                       <a:pPr algn="ctr"/>
@@ -8431,7 +8248,7 @@
                 </a:tc>
                 <a:tc>
                   <a:txBody>
-                    <a:bodyPr wrap="square" anchor="ctr" lIns="63500" rIns="63500" tIns="25400" bIns="25400"/>
+                    <a:bodyPr/>
                     <a:lstStyle/>
                     <a:p>
                       <a:pPr algn="ctr"/>
@@ -8473,7 +8290,7 @@
                 </a:tc>
                 <a:tc>
                   <a:txBody>
-                    <a:bodyPr wrap="square" anchor="ctr" lIns="63500" rIns="63500" tIns="25400" bIns="25400"/>
+                    <a:bodyPr/>
                     <a:lstStyle/>
                     <a:p>
                       <a:pPr algn="ctr"/>
@@ -8513,11 +8330,16 @@
                     </a:solidFill>
                   </a:tcPr>
                 </a:tc>
+                <a:extLst>
+                  <a:ext uri="{0D108BD9-81ED-4DB2-BD59-A6C34878D82A}">
+                    <a16:rowId xmlns:a16="http://schemas.microsoft.com/office/drawing/2014/main" val="10000"/>
+                  </a:ext>
+                </a:extLst>
               </a:tr>
               <a:tr h="787400">
                 <a:tc>
                   <a:txBody>
-                    <a:bodyPr wrap="square" anchor="ctr" lIns="63500" rIns="63500" tIns="25400" bIns="25400"/>
+                    <a:bodyPr/>
                     <a:lstStyle/>
                     <a:p>
                       <a:pPr algn="ctr"/>
@@ -8559,7 +8381,7 @@
                 </a:tc>
                 <a:tc>
                   <a:txBody>
-                    <a:bodyPr wrap="square" anchor="ctr" lIns="63500" rIns="63500" tIns="25400" bIns="25400"/>
+                    <a:bodyPr/>
                     <a:lstStyle/>
                     <a:p>
                       <a:pPr algn="ctr"/>
@@ -8601,7 +8423,7 @@
                 </a:tc>
                 <a:tc>
                   <a:txBody>
-                    <a:bodyPr wrap="square" anchor="ctr" lIns="63500" rIns="63500" tIns="25400" bIns="25400"/>
+                    <a:bodyPr/>
                     <a:lstStyle/>
                     <a:p>
                       <a:pPr algn="ctr"/>
@@ -8643,7 +8465,7 @@
                 </a:tc>
                 <a:tc>
                   <a:txBody>
-                    <a:bodyPr wrap="square" anchor="ctr" lIns="63500" rIns="63500" tIns="25400" bIns="25400"/>
+                    <a:bodyPr/>
                     <a:lstStyle/>
                     <a:p>
                       <a:pPr algn="ctr"/>
@@ -8683,11 +8505,16 @@
                     </a:solidFill>
                   </a:tcPr>
                 </a:tc>
+                <a:extLst>
+                  <a:ext uri="{0D108BD9-81ED-4DB2-BD59-A6C34878D82A}">
+                    <a16:rowId xmlns:a16="http://schemas.microsoft.com/office/drawing/2014/main" val="10001"/>
+                  </a:ext>
+                </a:extLst>
               </a:tr>
               <a:tr h="787400">
                 <a:tc>
                   <a:txBody>
-                    <a:bodyPr wrap="square" anchor="ctr" lIns="63500" rIns="63500" tIns="25400" bIns="25400"/>
+                    <a:bodyPr/>
                     <a:lstStyle/>
                     <a:p>
                       <a:pPr algn="ctr"/>
@@ -8729,7 +8556,7 @@
                 </a:tc>
                 <a:tc>
                   <a:txBody>
-                    <a:bodyPr wrap="square" anchor="ctr" lIns="63500" rIns="63500" tIns="25400" bIns="25400"/>
+                    <a:bodyPr/>
                     <a:lstStyle/>
                     <a:p>
                       <a:pPr algn="ctr"/>
@@ -8771,7 +8598,7 @@
                 </a:tc>
                 <a:tc>
                   <a:txBody>
-                    <a:bodyPr wrap="square" anchor="ctr" lIns="63500" rIns="63500" tIns="25400" bIns="25400"/>
+                    <a:bodyPr/>
                     <a:lstStyle/>
                     <a:p>
                       <a:pPr algn="ctr"/>
@@ -8813,7 +8640,7 @@
                 </a:tc>
                 <a:tc>
                   <a:txBody>
-                    <a:bodyPr wrap="square" anchor="ctr" lIns="63500" rIns="63500" tIns="25400" bIns="25400"/>
+                    <a:bodyPr/>
                     <a:lstStyle/>
                     <a:p>
                       <a:pPr algn="ctr"/>
@@ -8853,11 +8680,16 @@
                     </a:solidFill>
                   </a:tcPr>
                 </a:tc>
+                <a:extLst>
+                  <a:ext uri="{0D108BD9-81ED-4DB2-BD59-A6C34878D82A}">
+                    <a16:rowId xmlns:a16="http://schemas.microsoft.com/office/drawing/2014/main" val="10002"/>
+                  </a:ext>
+                </a:extLst>
               </a:tr>
               <a:tr h="787400">
                 <a:tc>
                   <a:txBody>
-                    <a:bodyPr wrap="square" anchor="ctr" lIns="63500" rIns="63500" tIns="25400" bIns="25400"/>
+                    <a:bodyPr/>
                     <a:lstStyle/>
                     <a:p>
                       <a:pPr algn="ctr"/>
@@ -8899,7 +8731,7 @@
                 </a:tc>
                 <a:tc>
                   <a:txBody>
-                    <a:bodyPr wrap="square" anchor="ctr" lIns="63500" rIns="63500" tIns="25400" bIns="25400"/>
+                    <a:bodyPr/>
                     <a:lstStyle/>
                     <a:p>
                       <a:pPr algn="ctr"/>
@@ -8941,7 +8773,7 @@
                 </a:tc>
                 <a:tc>
                   <a:txBody>
-                    <a:bodyPr wrap="square" anchor="ctr" lIns="63500" rIns="63500" tIns="25400" bIns="25400"/>
+                    <a:bodyPr/>
                     <a:lstStyle/>
                     <a:p>
                       <a:pPr algn="ctr"/>
@@ -8983,7 +8815,7 @@
                 </a:tc>
                 <a:tc>
                   <a:txBody>
-                    <a:bodyPr wrap="square" anchor="ctr" lIns="63500" rIns="63500" tIns="25400" bIns="25400"/>
+                    <a:bodyPr/>
                     <a:lstStyle/>
                     <a:p>
                       <a:pPr algn="ctr"/>
@@ -9023,11 +8855,16 @@
                     </a:solidFill>
                   </a:tcPr>
                 </a:tc>
+                <a:extLst>
+                  <a:ext uri="{0D108BD9-81ED-4DB2-BD59-A6C34878D82A}">
+                    <a16:rowId xmlns:a16="http://schemas.microsoft.com/office/drawing/2014/main" val="10003"/>
+                  </a:ext>
+                </a:extLst>
               </a:tr>
               <a:tr h="787400">
                 <a:tc>
                   <a:txBody>
-                    <a:bodyPr wrap="square" anchor="ctr" lIns="63500" rIns="63500" tIns="25400" bIns="25400"/>
+                    <a:bodyPr/>
                     <a:lstStyle/>
                     <a:p>
                       <a:pPr algn="ctr"/>
@@ -9069,7 +8906,7 @@
                 </a:tc>
                 <a:tc>
                   <a:txBody>
-                    <a:bodyPr wrap="square" anchor="ctr" lIns="63500" rIns="63500" tIns="25400" bIns="25400"/>
+                    <a:bodyPr/>
                     <a:lstStyle/>
                     <a:p>
                       <a:pPr algn="ctr"/>
@@ -9111,7 +8948,7 @@
                 </a:tc>
                 <a:tc>
                   <a:txBody>
-                    <a:bodyPr wrap="square" anchor="ctr" lIns="63500" rIns="63500" tIns="25400" bIns="25400"/>
+                    <a:bodyPr/>
                     <a:lstStyle/>
                     <a:p>
                       <a:pPr algn="ctr"/>
@@ -9153,7 +8990,7 @@
                 </a:tc>
                 <a:tc>
                   <a:txBody>
-                    <a:bodyPr wrap="square" anchor="ctr" lIns="63500" rIns="63500" tIns="25400" bIns="25400"/>
+                    <a:bodyPr/>
                     <a:lstStyle/>
                     <a:p>
                       <a:pPr algn="ctr"/>
@@ -9193,6 +9030,11 @@
                     </a:solidFill>
                   </a:tcPr>
                 </a:tc>
+                <a:extLst>
+                  <a:ext uri="{0D108BD9-81ED-4DB2-BD59-A6C34878D82A}">
+                    <a16:rowId xmlns:a16="http://schemas.microsoft.com/office/drawing/2014/main" val="10004"/>
+                  </a:ext>
+                </a:extLst>
               </a:tr>
             </a:tbl>
           </a:graphicData>
@@ -9215,7 +9057,7 @@
           <a:noFill/>
         </p:spPr>
         <p:txBody>
-          <a:bodyPr wrap="square" anchor="ctr" lIns="0" rIns="0" tIns="25400" bIns="25400">
+          <a:bodyPr wrap="square" lIns="0" tIns="25400" rIns="0" bIns="25400" anchor="ctr">
             <a:spAutoFit/>
           </a:bodyPr>
           <a:lstStyle/>
@@ -9258,6 +9100,7 @@
           <a:lstStyle/>
           <a:p>
             <a:pPr algn="ctr"/>
+            <a:endParaRPr/>
           </a:p>
         </p:txBody>
       </p:sp>
@@ -9278,7 +9121,7 @@
           <a:noFill/>
         </p:spPr>
         <p:txBody>
-          <a:bodyPr wrap="square" anchor="ctr" lIns="0" rIns="0" tIns="25400" bIns="25400">
+          <a:bodyPr wrap="square" lIns="0" tIns="25400" rIns="0" bIns="25400" anchor="ctr">
             <a:spAutoFit/>
           </a:bodyPr>
           <a:lstStyle/>
@@ -9312,7 +9155,7 @@
           <a:noFill/>
         </p:spPr>
         <p:txBody>
-          <a:bodyPr wrap="square" anchor="ctr" lIns="0" rIns="0" tIns="25400" bIns="25400">
+          <a:bodyPr wrap="square" lIns="0" tIns="25400" rIns="0" bIns="25400" anchor="ctr">
             <a:spAutoFit/>
           </a:bodyPr>
           <a:lstStyle/>
@@ -9355,6 +9198,7 @@
           <a:lstStyle/>
           <a:p>
             <a:pPr algn="ctr"/>
+            <a:endParaRPr/>
           </a:p>
         </p:txBody>
       </p:sp>
@@ -9375,7 +9219,7 @@
           <a:noFill/>
         </p:spPr>
         <p:txBody>
-          <a:bodyPr wrap="square" anchor="ctr" lIns="0" rIns="0" tIns="25400" bIns="25400">
+          <a:bodyPr wrap="square" lIns="0" tIns="25400" rIns="0" bIns="25400" anchor="ctr">
             <a:spAutoFit/>
           </a:bodyPr>
           <a:lstStyle/>
@@ -9409,7 +9253,7 @@
           <a:noFill/>
         </p:spPr>
         <p:txBody>
-          <a:bodyPr wrap="square" anchor="ctr" lIns="0" rIns="0" tIns="25400" bIns="25400">
+          <a:bodyPr wrap="square" lIns="0" tIns="25400" rIns="0" bIns="25400" anchor="ctr">
             <a:spAutoFit/>
           </a:bodyPr>
           <a:lstStyle/>
@@ -9452,6 +9296,7 @@
           <a:lstStyle/>
           <a:p>
             <a:pPr algn="ctr"/>
+            <a:endParaRPr/>
           </a:p>
         </p:txBody>
       </p:sp>
@@ -9472,7 +9317,7 @@
           <a:noFill/>
         </p:spPr>
         <p:txBody>
-          <a:bodyPr wrap="square" anchor="ctr" lIns="0" rIns="0" tIns="25400" bIns="25400">
+          <a:bodyPr wrap="square" lIns="0" tIns="25400" rIns="0" bIns="25400" anchor="ctr">
             <a:spAutoFit/>
           </a:bodyPr>
           <a:lstStyle/>
@@ -9506,7 +9351,7 @@
           <a:noFill/>
         </p:spPr>
         <p:txBody>
-          <a:bodyPr wrap="square" anchor="ctr" lIns="0" rIns="0" tIns="25400" bIns="25400">
+          <a:bodyPr wrap="square" lIns="0" tIns="25400" rIns="0" bIns="25400" anchor="ctr">
             <a:spAutoFit/>
           </a:bodyPr>
           <a:lstStyle/>
@@ -9549,6 +9394,7 @@
           <a:lstStyle/>
           <a:p>
             <a:pPr algn="ctr"/>
+            <a:endParaRPr/>
           </a:p>
         </p:txBody>
       </p:sp>
@@ -9569,7 +9415,7 @@
           <a:noFill/>
         </p:spPr>
         <p:txBody>
-          <a:bodyPr wrap="square" anchor="ctr" lIns="0" rIns="0" tIns="25400" bIns="25400">
+          <a:bodyPr wrap="square" lIns="0" tIns="25400" rIns="0" bIns="25400" anchor="ctr">
             <a:spAutoFit/>
           </a:bodyPr>
           <a:lstStyle/>
@@ -9603,7 +9449,7 @@
           <a:noFill/>
         </p:spPr>
         <p:txBody>
-          <a:bodyPr wrap="square" anchor="ctr" lIns="0" rIns="0" tIns="25400" bIns="25400">
+          <a:bodyPr wrap="square" lIns="0" tIns="25400" rIns="0" bIns="25400" anchor="ctr">
             <a:spAutoFit/>
           </a:bodyPr>
           <a:lstStyle/>
@@ -9637,7 +9483,7 @@
           <a:noFill/>
         </p:spPr>
         <p:txBody>
-          <a:bodyPr wrap="square" anchor="t" lIns="0" rIns="0" tIns="25400" bIns="25400">
+          <a:bodyPr wrap="square" lIns="0" tIns="25400" rIns="0" bIns="25400" anchor="t">
             <a:spAutoFit/>
           </a:bodyPr>
           <a:lstStyle/>
@@ -9649,7 +9495,7 @@
                   <a:srgbClr val="288D26"/>
                 </a:solidFill>
               </a:rPr>
-              <a:t xml:space="preserve">첫 고객  </a:t>
+              <a:t>첫 고객  </a:t>
             </a:r>
             <a:r>
               <a:rPr sz="2200" b="1" i="0">
@@ -9668,7 +9514,7 @@
                   <a:srgbClr val="288D26"/>
                 </a:solidFill>
               </a:rPr>
-              <a:t xml:space="preserve">확장  </a:t>
+              <a:t>확장  </a:t>
             </a:r>
             <a:r>
               <a:rPr sz="2200" b="1" i="0">
@@ -9681,6 +9527,170 @@
           </a:p>
         </p:txBody>
       </p:sp>
+      <p:pic>
+        <p:nvPicPr>
+          <p:cNvPr id="4" name="앱 사진 계약 당일 체크">
+            <a:extLst>
+              <a:ext uri="{FF2B5EF4-FFF2-40B4-BE49-F238E27FC236}">
+                <a16:creationId xmlns:a16="http://schemas.microsoft.com/office/drawing/2014/main" id="{26F79AE2-85AC-1D8A-3A4B-B23F7D725925}"/>
+              </a:ext>
+            </a:extLst>
+          </p:cNvPr>
+          <p:cNvPicPr>
+            <a:picLocks/>
+          </p:cNvPicPr>
+          <p:nvPr/>
+        </p:nvPicPr>
+        <p:blipFill>
+          <a:blip r:embed="rId3">
+            <a:extLst>
+              <a:ext uri="{28A0092B-C50C-407E-A947-70E740481C1C}">
+                <a14:useLocalDpi xmlns:a14="http://schemas.microsoft.com/office/drawing/2010/main" val="0"/>
+              </a:ext>
+            </a:extLst>
+          </a:blip>
+          <a:stretch>
+            <a:fillRect/>
+          </a:stretch>
+        </p:blipFill>
+        <p:spPr>
+          <a:xfrm>
+            <a:off x="15966694" y="29718000"/>
+            <a:ext cx="2229612" cy="4191000"/>
+          </a:xfrm>
+          <a:prstGeom prst="rect">
+            <a:avLst/>
+          </a:prstGeom>
+          <a:ln w="12700">
+            <a:solidFill>
+              <a:srgbClr val="D9D9D9"/>
+            </a:solidFill>
+          </a:ln>
+        </p:spPr>
+      </p:pic>
+      <p:pic>
+        <p:nvPicPr>
+          <p:cNvPr id="7" name="앱 사진 바뀐 할 일 목록">
+            <a:extLst>
+              <a:ext uri="{FF2B5EF4-FFF2-40B4-BE49-F238E27FC236}">
+                <a16:creationId xmlns:a16="http://schemas.microsoft.com/office/drawing/2014/main" id="{9F824834-D409-E85D-8190-7D5D7C9B9483}"/>
+              </a:ext>
+            </a:extLst>
+          </p:cNvPr>
+          <p:cNvPicPr>
+            <a:picLocks/>
+          </p:cNvPicPr>
+          <p:nvPr/>
+        </p:nvPicPr>
+        <p:blipFill>
+          <a:blip r:embed="rId4">
+            <a:extLst>
+              <a:ext uri="{28A0092B-C50C-407E-A947-70E740481C1C}">
+                <a14:useLocalDpi xmlns:a14="http://schemas.microsoft.com/office/drawing/2010/main" val="0"/>
+              </a:ext>
+            </a:extLst>
+          </a:blip>
+          <a:stretch>
+            <a:fillRect/>
+          </a:stretch>
+        </p:blipFill>
+        <p:spPr>
+          <a:xfrm>
+            <a:off x="19675887" y="29718000"/>
+            <a:ext cx="2177224" cy="4191000"/>
+          </a:xfrm>
+          <a:prstGeom prst="rect">
+            <a:avLst/>
+          </a:prstGeom>
+          <a:ln w="12700">
+            <a:solidFill>
+              <a:srgbClr val="D9D9D9"/>
+            </a:solidFill>
+          </a:ln>
+        </p:spPr>
+      </p:pic>
+      <p:pic>
+        <p:nvPicPr>
+          <p:cNvPr id="12" name="앱 사진 판정 결과">
+            <a:extLst>
+              <a:ext uri="{FF2B5EF4-FFF2-40B4-BE49-F238E27FC236}">
+                <a16:creationId xmlns:a16="http://schemas.microsoft.com/office/drawing/2014/main" id="{22BC68A0-4EE0-AF8C-AE98-DF867199A5C2}"/>
+              </a:ext>
+            </a:extLst>
+          </p:cNvPr>
+          <p:cNvPicPr>
+            <a:picLocks/>
+          </p:cNvPicPr>
+          <p:nvPr/>
+        </p:nvPicPr>
+        <p:blipFill>
+          <a:blip r:embed="rId5">
+            <a:extLst>
+              <a:ext uri="{28A0092B-C50C-407E-A947-70E740481C1C}">
+                <a14:useLocalDpi xmlns:a14="http://schemas.microsoft.com/office/drawing/2010/main" val="0"/>
+              </a:ext>
+            </a:extLst>
+          </a:blip>
+          <a:stretch>
+            <a:fillRect/>
+          </a:stretch>
+        </p:blipFill>
+        <p:spPr>
+          <a:xfrm>
+            <a:off x="15966694" y="36423600"/>
+            <a:ext cx="2229612" cy="4191000"/>
+          </a:xfrm>
+          <a:prstGeom prst="rect">
+            <a:avLst/>
+          </a:prstGeom>
+          <a:ln w="12700">
+            <a:solidFill>
+              <a:srgbClr val="D9D9D9"/>
+            </a:solidFill>
+          </a:ln>
+        </p:spPr>
+      </p:pic>
+      <p:pic>
+        <p:nvPicPr>
+          <p:cNvPr id="14" name="앱 사진 역전세 경보">
+            <a:extLst>
+              <a:ext uri="{FF2B5EF4-FFF2-40B4-BE49-F238E27FC236}">
+                <a16:creationId xmlns:a16="http://schemas.microsoft.com/office/drawing/2014/main" id="{1B4A8C2E-D094-05D7-FD7C-799B81B4FC16}"/>
+              </a:ext>
+            </a:extLst>
+          </p:cNvPr>
+          <p:cNvPicPr>
+            <a:picLocks/>
+          </p:cNvPicPr>
+          <p:nvPr/>
+        </p:nvPicPr>
+        <p:blipFill>
+          <a:blip r:embed="rId6">
+            <a:extLst>
+              <a:ext uri="{28A0092B-C50C-407E-A947-70E740481C1C}">
+                <a14:useLocalDpi xmlns:a14="http://schemas.microsoft.com/office/drawing/2010/main" val="0"/>
+              </a:ext>
+            </a:extLst>
+          </a:blip>
+          <a:stretch>
+            <a:fillRect/>
+          </a:stretch>
+        </p:blipFill>
+        <p:spPr>
+          <a:xfrm>
+            <a:off x="19666128" y="36423600"/>
+            <a:ext cx="2196743" cy="4191000"/>
+          </a:xfrm>
+          <a:prstGeom prst="rect">
+            <a:avLst/>
+          </a:prstGeom>
+          <a:ln w="12700">
+            <a:solidFill>
+              <a:srgbClr val="D9D9D9"/>
+            </a:solidFill>
+          </a:ln>
+        </p:spPr>
+      </p:pic>
     </p:spTree>
     <p:extLst>
       <p:ext uri="{BB962C8B-B14F-4D97-AF65-F5344CB8AC3E}">
